--- a/public/templates/slide/ビジュアルデッキ_マガジン_TemplateOnly.pptx
+++ b/public/templates/slide/ビジュアルデッキ_マガジン_TemplateOnly.pptx
@@ -421,6 +421,36 @@
                 <a:ea typeface="Yu Gothic"/>
               </a:defRPr>
             </a:lvl1pPr>
+            <a:lvl2pPr algn="l" marL="0" indent="0">
+              <a:buNone/>
+              <a:defRPr sz="1050" b="0">
+                <a:solidFill>
+                  <a:srgbClr val="8A8580"/>
+                </a:solidFill>
+                <a:latin typeface="Yu Gothic"/>
+                <a:ea typeface="Yu Gothic"/>
+              </a:defRPr>
+            </a:lvl2pPr>
+            <a:lvl3pPr algn="l" marL="0" indent="0">
+              <a:buNone/>
+              <a:defRPr sz="900" b="0">
+                <a:solidFill>
+                  <a:srgbClr val="8A8580"/>
+                </a:solidFill>
+                <a:latin typeface="Yu Gothic"/>
+                <a:ea typeface="Yu Gothic"/>
+              </a:defRPr>
+            </a:lvl3pPr>
+            <a:lvl4pPr algn="l" marL="0" indent="0">
+              <a:buNone/>
+              <a:defRPr sz="750" b="0">
+                <a:solidFill>
+                  <a:srgbClr val="8A8580"/>
+                </a:solidFill>
+                <a:latin typeface="Yu Gothic"/>
+                <a:ea typeface="Yu Gothic"/>
+              </a:defRPr>
+            </a:lvl4pPr>
           </a:lstStyle>
           <a:p>
             <a:r>
@@ -702,6 +732,36 @@
                 <a:ea typeface="Yu Gothic"/>
               </a:defRPr>
             </a:lvl1pPr>
+            <a:lvl2pPr algn="l" marL="0" indent="0">
+              <a:buNone/>
+              <a:defRPr sz="1150" b="0">
+                <a:solidFill>
+                  <a:srgbClr val="B8AF9F"/>
+                </a:solidFill>
+                <a:latin typeface="Yu Gothic"/>
+                <a:ea typeface="Yu Gothic"/>
+              </a:defRPr>
+            </a:lvl2pPr>
+            <a:lvl3pPr algn="l" marL="0" indent="0">
+              <a:buNone/>
+              <a:defRPr sz="1000" b="0">
+                <a:solidFill>
+                  <a:srgbClr val="B8AF9F"/>
+                </a:solidFill>
+                <a:latin typeface="Yu Gothic"/>
+                <a:ea typeface="Yu Gothic"/>
+              </a:defRPr>
+            </a:lvl3pPr>
+            <a:lvl4pPr algn="l" marL="0" indent="0">
+              <a:buNone/>
+              <a:defRPr sz="800" b="0">
+                <a:solidFill>
+                  <a:srgbClr val="B8AF9F"/>
+                </a:solidFill>
+                <a:latin typeface="Yu Gothic"/>
+                <a:ea typeface="Yu Gothic"/>
+              </a:defRPr>
+            </a:lvl4pPr>
           </a:lstStyle>
           <a:p>
             <a:r>
@@ -888,6 +948,20 @@
                 </a:solidFill>
               </a:defRPr>
             </a:lvl1pPr>
+            <a:lvl2pPr algn="l">
+              <a:defRPr sz="1750" b="0">
+                <a:solidFill>
+                  <a:srgbClr val="1A1A1A"/>
+                </a:solidFill>
+              </a:defRPr>
+            </a:lvl2pPr>
+            <a:lvl3pPr algn="l">
+              <a:defRPr sz="1500" b="0">
+                <a:solidFill>
+                  <a:srgbClr val="1A1A1A"/>
+                </a:solidFill>
+              </a:defRPr>
+            </a:lvl3pPr>
           </a:lstStyle>
           <a:p>
             <a:pPr lvl="0"/>
@@ -1245,6 +1319,39 @@
                 <a:cs typeface="Yu Gothic"/>
               </a:defRPr>
             </a:lvl1pPr>
+            <a:lvl2pPr algn="l" marL="0" indent="0">
+              <a:buNone/>
+              <a:defRPr sz="1150" b="1">
+                <a:solidFill>
+                  <a:srgbClr val="8A8580"/>
+                </a:solidFill>
+                <a:latin typeface="Yu Gothic"/>
+                <a:ea typeface="Yu Gothic"/>
+                <a:cs typeface="Yu Gothic"/>
+              </a:defRPr>
+            </a:lvl2pPr>
+            <a:lvl3pPr algn="l" marL="0" indent="0">
+              <a:buNone/>
+              <a:defRPr sz="1000" b="1">
+                <a:solidFill>
+                  <a:srgbClr val="8A8580"/>
+                </a:solidFill>
+                <a:latin typeface="Yu Gothic"/>
+                <a:ea typeface="Yu Gothic"/>
+                <a:cs typeface="Yu Gothic"/>
+              </a:defRPr>
+            </a:lvl3pPr>
+            <a:lvl4pPr algn="l" marL="0" indent="0">
+              <a:buNone/>
+              <a:defRPr sz="800" b="1">
+                <a:solidFill>
+                  <a:srgbClr val="8A8580"/>
+                </a:solidFill>
+                <a:latin typeface="Yu Gothic"/>
+                <a:ea typeface="Yu Gothic"/>
+                <a:cs typeface="Yu Gothic"/>
+              </a:defRPr>
+            </a:lvl4pPr>
           </a:lstStyle>
           <a:p>
             <a:r>
@@ -1323,6 +1430,39 @@
                 <a:cs typeface="Yu Gothic"/>
               </a:defRPr>
             </a:lvl1pPr>
+            <a:lvl2pPr algn="l" marL="0" indent="0">
+              <a:buNone/>
+              <a:defRPr sz="1150" b="0">
+                <a:solidFill>
+                  <a:srgbClr val="21201E"/>
+                </a:solidFill>
+                <a:latin typeface="Yu Gothic"/>
+                <a:ea typeface="Yu Gothic"/>
+                <a:cs typeface="Yu Gothic"/>
+              </a:defRPr>
+            </a:lvl2pPr>
+            <a:lvl3pPr algn="l" marL="0" indent="0">
+              <a:buNone/>
+              <a:defRPr sz="1000" b="0">
+                <a:solidFill>
+                  <a:srgbClr val="21201E"/>
+                </a:solidFill>
+                <a:latin typeface="Yu Gothic"/>
+                <a:ea typeface="Yu Gothic"/>
+                <a:cs typeface="Yu Gothic"/>
+              </a:defRPr>
+            </a:lvl3pPr>
+            <a:lvl4pPr algn="l" marL="0" indent="0">
+              <a:buNone/>
+              <a:defRPr sz="800" b="0">
+                <a:solidFill>
+                  <a:srgbClr val="21201E"/>
+                </a:solidFill>
+                <a:latin typeface="Yu Gothic"/>
+                <a:ea typeface="Yu Gothic"/>
+                <a:cs typeface="Yu Gothic"/>
+              </a:defRPr>
+            </a:lvl4pPr>
           </a:lstStyle>
           <a:p>
             <a:r>
@@ -1362,6 +1502,39 @@
                 <a:cs typeface="Yu Gothic"/>
               </a:defRPr>
             </a:lvl1pPr>
+            <a:lvl2pPr algn="l" marL="0" indent="0">
+              <a:buNone/>
+              <a:defRPr sz="1150" b="1">
+                <a:solidFill>
+                  <a:srgbClr val="8A8580"/>
+                </a:solidFill>
+                <a:latin typeface="Yu Gothic"/>
+                <a:ea typeface="Yu Gothic"/>
+                <a:cs typeface="Yu Gothic"/>
+              </a:defRPr>
+            </a:lvl2pPr>
+            <a:lvl3pPr algn="l" marL="0" indent="0">
+              <a:buNone/>
+              <a:defRPr sz="1000" b="1">
+                <a:solidFill>
+                  <a:srgbClr val="8A8580"/>
+                </a:solidFill>
+                <a:latin typeface="Yu Gothic"/>
+                <a:ea typeface="Yu Gothic"/>
+                <a:cs typeface="Yu Gothic"/>
+              </a:defRPr>
+            </a:lvl3pPr>
+            <a:lvl4pPr algn="l" marL="0" indent="0">
+              <a:buNone/>
+              <a:defRPr sz="800" b="1">
+                <a:solidFill>
+                  <a:srgbClr val="8A8580"/>
+                </a:solidFill>
+                <a:latin typeface="Yu Gothic"/>
+                <a:ea typeface="Yu Gothic"/>
+                <a:cs typeface="Yu Gothic"/>
+              </a:defRPr>
+            </a:lvl4pPr>
           </a:lstStyle>
           <a:p>
             <a:r>
@@ -1440,6 +1613,39 @@
                 <a:cs typeface="Yu Gothic"/>
               </a:defRPr>
             </a:lvl1pPr>
+            <a:lvl2pPr algn="l" marL="0" indent="0">
+              <a:buNone/>
+              <a:defRPr sz="1150" b="0">
+                <a:solidFill>
+                  <a:srgbClr val="21201E"/>
+                </a:solidFill>
+                <a:latin typeface="Yu Gothic"/>
+                <a:ea typeface="Yu Gothic"/>
+                <a:cs typeface="Yu Gothic"/>
+              </a:defRPr>
+            </a:lvl2pPr>
+            <a:lvl3pPr algn="l" marL="0" indent="0">
+              <a:buNone/>
+              <a:defRPr sz="1000" b="0">
+                <a:solidFill>
+                  <a:srgbClr val="21201E"/>
+                </a:solidFill>
+                <a:latin typeface="Yu Gothic"/>
+                <a:ea typeface="Yu Gothic"/>
+                <a:cs typeface="Yu Gothic"/>
+              </a:defRPr>
+            </a:lvl3pPr>
+            <a:lvl4pPr algn="l" marL="0" indent="0">
+              <a:buNone/>
+              <a:defRPr sz="800" b="0">
+                <a:solidFill>
+                  <a:srgbClr val="21201E"/>
+                </a:solidFill>
+                <a:latin typeface="Yu Gothic"/>
+                <a:ea typeface="Yu Gothic"/>
+                <a:cs typeface="Yu Gothic"/>
+              </a:defRPr>
+            </a:lvl4pPr>
           </a:lstStyle>
           <a:p>
             <a:r>
@@ -1479,6 +1685,39 @@
                 <a:cs typeface="Yu Gothic"/>
               </a:defRPr>
             </a:lvl1pPr>
+            <a:lvl2pPr algn="l" marL="0" indent="0">
+              <a:buNone/>
+              <a:defRPr sz="1150" b="1">
+                <a:solidFill>
+                  <a:srgbClr val="8A8580"/>
+                </a:solidFill>
+                <a:latin typeface="Yu Gothic"/>
+                <a:ea typeface="Yu Gothic"/>
+                <a:cs typeface="Yu Gothic"/>
+              </a:defRPr>
+            </a:lvl2pPr>
+            <a:lvl3pPr algn="l" marL="0" indent="0">
+              <a:buNone/>
+              <a:defRPr sz="1000" b="1">
+                <a:solidFill>
+                  <a:srgbClr val="8A8580"/>
+                </a:solidFill>
+                <a:latin typeface="Yu Gothic"/>
+                <a:ea typeface="Yu Gothic"/>
+                <a:cs typeface="Yu Gothic"/>
+              </a:defRPr>
+            </a:lvl3pPr>
+            <a:lvl4pPr algn="l" marL="0" indent="0">
+              <a:buNone/>
+              <a:defRPr sz="800" b="1">
+                <a:solidFill>
+                  <a:srgbClr val="8A8580"/>
+                </a:solidFill>
+                <a:latin typeface="Yu Gothic"/>
+                <a:ea typeface="Yu Gothic"/>
+                <a:cs typeface="Yu Gothic"/>
+              </a:defRPr>
+            </a:lvl4pPr>
           </a:lstStyle>
           <a:p>
             <a:r>
@@ -1557,6 +1796,39 @@
                 <a:cs typeface="Yu Gothic"/>
               </a:defRPr>
             </a:lvl1pPr>
+            <a:lvl2pPr algn="l" marL="0" indent="0">
+              <a:buNone/>
+              <a:defRPr sz="1150" b="0">
+                <a:solidFill>
+                  <a:srgbClr val="21201E"/>
+                </a:solidFill>
+                <a:latin typeface="Yu Gothic"/>
+                <a:ea typeface="Yu Gothic"/>
+                <a:cs typeface="Yu Gothic"/>
+              </a:defRPr>
+            </a:lvl2pPr>
+            <a:lvl3pPr algn="l" marL="0" indent="0">
+              <a:buNone/>
+              <a:defRPr sz="1000" b="0">
+                <a:solidFill>
+                  <a:srgbClr val="21201E"/>
+                </a:solidFill>
+                <a:latin typeface="Yu Gothic"/>
+                <a:ea typeface="Yu Gothic"/>
+                <a:cs typeface="Yu Gothic"/>
+              </a:defRPr>
+            </a:lvl3pPr>
+            <a:lvl4pPr algn="l" marL="0" indent="0">
+              <a:buNone/>
+              <a:defRPr sz="800" b="0">
+                <a:solidFill>
+                  <a:srgbClr val="21201E"/>
+                </a:solidFill>
+                <a:latin typeface="Yu Gothic"/>
+                <a:ea typeface="Yu Gothic"/>
+                <a:cs typeface="Yu Gothic"/>
+              </a:defRPr>
+            </a:lvl4pPr>
           </a:lstStyle>
           <a:p>
             <a:r>
@@ -1882,6 +2154,39 @@
                 <a:cs typeface="Yu Gothic"/>
               </a:defRPr>
             </a:lvl1pPr>
+            <a:lvl2pPr algn="l" marL="0" indent="0">
+              <a:buNone/>
+              <a:defRPr sz="1500" b="1">
+                <a:solidFill>
+                  <a:srgbClr val="21201E"/>
+                </a:solidFill>
+                <a:latin typeface="Yu Gothic"/>
+                <a:ea typeface="Yu Gothic"/>
+                <a:cs typeface="Yu Gothic"/>
+              </a:defRPr>
+            </a:lvl2pPr>
+            <a:lvl3pPr algn="l" marL="0" indent="0">
+              <a:buNone/>
+              <a:defRPr sz="1300" b="1">
+                <a:solidFill>
+                  <a:srgbClr val="21201E"/>
+                </a:solidFill>
+                <a:latin typeface="Yu Gothic"/>
+                <a:ea typeface="Yu Gothic"/>
+                <a:cs typeface="Yu Gothic"/>
+              </a:defRPr>
+            </a:lvl3pPr>
+            <a:lvl4pPr algn="l" marL="0" indent="0">
+              <a:buNone/>
+              <a:defRPr sz="1050" b="1">
+                <a:solidFill>
+                  <a:srgbClr val="21201E"/>
+                </a:solidFill>
+                <a:latin typeface="Yu Gothic"/>
+                <a:ea typeface="Yu Gothic"/>
+                <a:cs typeface="Yu Gothic"/>
+              </a:defRPr>
+            </a:lvl4pPr>
           </a:lstStyle>
           <a:p>
             <a:r>
@@ -1921,6 +2226,39 @@
                 <a:cs typeface="Yu Gothic"/>
               </a:defRPr>
             </a:lvl1pPr>
+            <a:lvl2pPr algn="l" marL="0" indent="0">
+              <a:buNone/>
+              <a:defRPr sz="1050" b="0">
+                <a:solidFill>
+                  <a:srgbClr val="8A8580"/>
+                </a:solidFill>
+                <a:latin typeface="Yu Gothic"/>
+                <a:ea typeface="Yu Gothic"/>
+                <a:cs typeface="Yu Gothic"/>
+              </a:defRPr>
+            </a:lvl2pPr>
+            <a:lvl3pPr algn="l" marL="0" indent="0">
+              <a:buNone/>
+              <a:defRPr sz="900" b="0">
+                <a:solidFill>
+                  <a:srgbClr val="8A8580"/>
+                </a:solidFill>
+                <a:latin typeface="Yu Gothic"/>
+                <a:ea typeface="Yu Gothic"/>
+                <a:cs typeface="Yu Gothic"/>
+              </a:defRPr>
+            </a:lvl3pPr>
+            <a:lvl4pPr algn="l" marL="0" indent="0">
+              <a:buNone/>
+              <a:defRPr sz="750" b="0">
+                <a:solidFill>
+                  <a:srgbClr val="8A8580"/>
+                </a:solidFill>
+                <a:latin typeface="Yu Gothic"/>
+                <a:ea typeface="Yu Gothic"/>
+                <a:cs typeface="Yu Gothic"/>
+              </a:defRPr>
+            </a:lvl4pPr>
           </a:lstStyle>
           <a:p>
             <a:r>
@@ -1960,6 +2298,39 @@
                 <a:cs typeface="Yu Gothic"/>
               </a:defRPr>
             </a:lvl1pPr>
+            <a:lvl2pPr algn="l" marL="0" indent="0">
+              <a:buNone/>
+              <a:defRPr sz="1500" b="1">
+                <a:solidFill>
+                  <a:srgbClr val="21201E"/>
+                </a:solidFill>
+                <a:latin typeface="Yu Gothic"/>
+                <a:ea typeface="Yu Gothic"/>
+                <a:cs typeface="Yu Gothic"/>
+              </a:defRPr>
+            </a:lvl2pPr>
+            <a:lvl3pPr algn="l" marL="0" indent="0">
+              <a:buNone/>
+              <a:defRPr sz="1300" b="1">
+                <a:solidFill>
+                  <a:srgbClr val="21201E"/>
+                </a:solidFill>
+                <a:latin typeface="Yu Gothic"/>
+                <a:ea typeface="Yu Gothic"/>
+                <a:cs typeface="Yu Gothic"/>
+              </a:defRPr>
+            </a:lvl3pPr>
+            <a:lvl4pPr algn="l" marL="0" indent="0">
+              <a:buNone/>
+              <a:defRPr sz="1050" b="1">
+                <a:solidFill>
+                  <a:srgbClr val="21201E"/>
+                </a:solidFill>
+                <a:latin typeface="Yu Gothic"/>
+                <a:ea typeface="Yu Gothic"/>
+                <a:cs typeface="Yu Gothic"/>
+              </a:defRPr>
+            </a:lvl4pPr>
           </a:lstStyle>
           <a:p>
             <a:r>
@@ -1999,6 +2370,39 @@
                 <a:cs typeface="Yu Gothic"/>
               </a:defRPr>
             </a:lvl1pPr>
+            <a:lvl2pPr algn="l" marL="0" indent="0">
+              <a:buNone/>
+              <a:defRPr sz="1050" b="0">
+                <a:solidFill>
+                  <a:srgbClr val="8A8580"/>
+                </a:solidFill>
+                <a:latin typeface="Yu Gothic"/>
+                <a:ea typeface="Yu Gothic"/>
+                <a:cs typeface="Yu Gothic"/>
+              </a:defRPr>
+            </a:lvl2pPr>
+            <a:lvl3pPr algn="l" marL="0" indent="0">
+              <a:buNone/>
+              <a:defRPr sz="900" b="0">
+                <a:solidFill>
+                  <a:srgbClr val="8A8580"/>
+                </a:solidFill>
+                <a:latin typeface="Yu Gothic"/>
+                <a:ea typeface="Yu Gothic"/>
+                <a:cs typeface="Yu Gothic"/>
+              </a:defRPr>
+            </a:lvl3pPr>
+            <a:lvl4pPr algn="l" marL="0" indent="0">
+              <a:buNone/>
+              <a:defRPr sz="750" b="0">
+                <a:solidFill>
+                  <a:srgbClr val="8A8580"/>
+                </a:solidFill>
+                <a:latin typeface="Yu Gothic"/>
+                <a:ea typeface="Yu Gothic"/>
+                <a:cs typeface="Yu Gothic"/>
+              </a:defRPr>
+            </a:lvl4pPr>
           </a:lstStyle>
           <a:p>
             <a:r>
@@ -2038,6 +2442,39 @@
                 <a:cs typeface="Yu Gothic"/>
               </a:defRPr>
             </a:lvl1pPr>
+            <a:lvl2pPr algn="l" marL="0" indent="0">
+              <a:buNone/>
+              <a:defRPr sz="1500" b="1">
+                <a:solidFill>
+                  <a:srgbClr val="21201E"/>
+                </a:solidFill>
+                <a:latin typeface="Yu Gothic"/>
+                <a:ea typeface="Yu Gothic"/>
+                <a:cs typeface="Yu Gothic"/>
+              </a:defRPr>
+            </a:lvl2pPr>
+            <a:lvl3pPr algn="l" marL="0" indent="0">
+              <a:buNone/>
+              <a:defRPr sz="1300" b="1">
+                <a:solidFill>
+                  <a:srgbClr val="21201E"/>
+                </a:solidFill>
+                <a:latin typeface="Yu Gothic"/>
+                <a:ea typeface="Yu Gothic"/>
+                <a:cs typeface="Yu Gothic"/>
+              </a:defRPr>
+            </a:lvl3pPr>
+            <a:lvl4pPr algn="l" marL="0" indent="0">
+              <a:buNone/>
+              <a:defRPr sz="1050" b="1">
+                <a:solidFill>
+                  <a:srgbClr val="21201E"/>
+                </a:solidFill>
+                <a:latin typeface="Yu Gothic"/>
+                <a:ea typeface="Yu Gothic"/>
+                <a:cs typeface="Yu Gothic"/>
+              </a:defRPr>
+            </a:lvl4pPr>
           </a:lstStyle>
           <a:p>
             <a:r>
@@ -2077,6 +2514,39 @@
                 <a:cs typeface="Yu Gothic"/>
               </a:defRPr>
             </a:lvl1pPr>
+            <a:lvl2pPr algn="l" marL="0" indent="0">
+              <a:buNone/>
+              <a:defRPr sz="1050" b="0">
+                <a:solidFill>
+                  <a:srgbClr val="8A8580"/>
+                </a:solidFill>
+                <a:latin typeface="Yu Gothic"/>
+                <a:ea typeface="Yu Gothic"/>
+                <a:cs typeface="Yu Gothic"/>
+              </a:defRPr>
+            </a:lvl2pPr>
+            <a:lvl3pPr algn="l" marL="0" indent="0">
+              <a:buNone/>
+              <a:defRPr sz="900" b="0">
+                <a:solidFill>
+                  <a:srgbClr val="8A8580"/>
+                </a:solidFill>
+                <a:latin typeface="Yu Gothic"/>
+                <a:ea typeface="Yu Gothic"/>
+                <a:cs typeface="Yu Gothic"/>
+              </a:defRPr>
+            </a:lvl3pPr>
+            <a:lvl4pPr algn="l" marL="0" indent="0">
+              <a:buNone/>
+              <a:defRPr sz="750" b="0">
+                <a:solidFill>
+                  <a:srgbClr val="8A8580"/>
+                </a:solidFill>
+                <a:latin typeface="Yu Gothic"/>
+                <a:ea typeface="Yu Gothic"/>
+                <a:cs typeface="Yu Gothic"/>
+              </a:defRPr>
+            </a:lvl4pPr>
           </a:lstStyle>
           <a:p>
             <a:r>
@@ -2453,6 +2923,39 @@
                 <a:cs typeface="Yu Gothic"/>
               </a:defRPr>
             </a:lvl1pPr>
+            <a:lvl2pPr algn="ctr" marL="0" indent="0">
+              <a:buNone/>
+              <a:defRPr sz="1050" b="1">
+                <a:solidFill>
+                  <a:srgbClr val="8A8580"/>
+                </a:solidFill>
+                <a:latin typeface="Yu Gothic"/>
+                <a:ea typeface="Yu Gothic"/>
+                <a:cs typeface="Yu Gothic"/>
+              </a:defRPr>
+            </a:lvl2pPr>
+            <a:lvl3pPr algn="ctr" marL="0" indent="0">
+              <a:buNone/>
+              <a:defRPr sz="900" b="1">
+                <a:solidFill>
+                  <a:srgbClr val="8A8580"/>
+                </a:solidFill>
+                <a:latin typeface="Yu Gothic"/>
+                <a:ea typeface="Yu Gothic"/>
+                <a:cs typeface="Yu Gothic"/>
+              </a:defRPr>
+            </a:lvl3pPr>
+            <a:lvl4pPr algn="ctr" marL="0" indent="0">
+              <a:buNone/>
+              <a:defRPr sz="750" b="1">
+                <a:solidFill>
+                  <a:srgbClr val="8A8580"/>
+                </a:solidFill>
+                <a:latin typeface="Yu Gothic"/>
+                <a:ea typeface="Yu Gothic"/>
+                <a:cs typeface="Yu Gothic"/>
+              </a:defRPr>
+            </a:lvl4pPr>
           </a:lstStyle>
           <a:p>
             <a:r>
@@ -2492,6 +2995,39 @@
                 <a:cs typeface="Yu Gothic"/>
               </a:defRPr>
             </a:lvl1pPr>
+            <a:lvl2pPr algn="ctr" marL="0" indent="0">
+              <a:buNone/>
+              <a:defRPr sz="1600" b="1">
+                <a:solidFill>
+                  <a:srgbClr val="21201E"/>
+                </a:solidFill>
+                <a:latin typeface="Yu Gothic"/>
+                <a:ea typeface="Yu Gothic"/>
+                <a:cs typeface="Yu Gothic"/>
+              </a:defRPr>
+            </a:lvl2pPr>
+            <a:lvl3pPr algn="ctr" marL="0" indent="0">
+              <a:buNone/>
+              <a:defRPr sz="1350" b="1">
+                <a:solidFill>
+                  <a:srgbClr val="21201E"/>
+                </a:solidFill>
+                <a:latin typeface="Yu Gothic"/>
+                <a:ea typeface="Yu Gothic"/>
+                <a:cs typeface="Yu Gothic"/>
+              </a:defRPr>
+            </a:lvl3pPr>
+            <a:lvl4pPr algn="ctr" marL="0" indent="0">
+              <a:buNone/>
+              <a:defRPr sz="1150" b="1">
+                <a:solidFill>
+                  <a:srgbClr val="21201E"/>
+                </a:solidFill>
+                <a:latin typeface="Yu Gothic"/>
+                <a:ea typeface="Yu Gothic"/>
+                <a:cs typeface="Yu Gothic"/>
+              </a:defRPr>
+            </a:lvl4pPr>
           </a:lstStyle>
           <a:p>
             <a:r>
@@ -2531,6 +3067,39 @@
                 <a:cs typeface="Yu Gothic"/>
               </a:defRPr>
             </a:lvl1pPr>
+            <a:lvl2pPr algn="ctr" marL="0" indent="0">
+              <a:buNone/>
+              <a:defRPr sz="1050" b="0">
+                <a:solidFill>
+                  <a:srgbClr val="8A8580"/>
+                </a:solidFill>
+                <a:latin typeface="Yu Gothic"/>
+                <a:ea typeface="Yu Gothic"/>
+                <a:cs typeface="Yu Gothic"/>
+              </a:defRPr>
+            </a:lvl2pPr>
+            <a:lvl3pPr algn="ctr" marL="0" indent="0">
+              <a:buNone/>
+              <a:defRPr sz="900" b="0">
+                <a:solidFill>
+                  <a:srgbClr val="8A8580"/>
+                </a:solidFill>
+                <a:latin typeface="Yu Gothic"/>
+                <a:ea typeface="Yu Gothic"/>
+                <a:cs typeface="Yu Gothic"/>
+              </a:defRPr>
+            </a:lvl3pPr>
+            <a:lvl4pPr algn="ctr" marL="0" indent="0">
+              <a:buNone/>
+              <a:defRPr sz="750" b="0">
+                <a:solidFill>
+                  <a:srgbClr val="8A8580"/>
+                </a:solidFill>
+                <a:latin typeface="Yu Gothic"/>
+                <a:ea typeface="Yu Gothic"/>
+                <a:cs typeface="Yu Gothic"/>
+              </a:defRPr>
+            </a:lvl4pPr>
           </a:lstStyle>
           <a:p>
             <a:r>
@@ -2570,6 +3139,39 @@
                 <a:cs typeface="Yu Gothic"/>
               </a:defRPr>
             </a:lvl1pPr>
+            <a:lvl2pPr algn="ctr" marL="0" indent="0">
+              <a:buNone/>
+              <a:defRPr sz="1050" b="1">
+                <a:solidFill>
+                  <a:srgbClr val="8A8580"/>
+                </a:solidFill>
+                <a:latin typeface="Yu Gothic"/>
+                <a:ea typeface="Yu Gothic"/>
+                <a:cs typeface="Yu Gothic"/>
+              </a:defRPr>
+            </a:lvl2pPr>
+            <a:lvl3pPr algn="ctr" marL="0" indent="0">
+              <a:buNone/>
+              <a:defRPr sz="900" b="1">
+                <a:solidFill>
+                  <a:srgbClr val="8A8580"/>
+                </a:solidFill>
+                <a:latin typeface="Yu Gothic"/>
+                <a:ea typeface="Yu Gothic"/>
+                <a:cs typeface="Yu Gothic"/>
+              </a:defRPr>
+            </a:lvl3pPr>
+            <a:lvl4pPr algn="ctr" marL="0" indent="0">
+              <a:buNone/>
+              <a:defRPr sz="750" b="1">
+                <a:solidFill>
+                  <a:srgbClr val="8A8580"/>
+                </a:solidFill>
+                <a:latin typeface="Yu Gothic"/>
+                <a:ea typeface="Yu Gothic"/>
+                <a:cs typeface="Yu Gothic"/>
+              </a:defRPr>
+            </a:lvl4pPr>
           </a:lstStyle>
           <a:p>
             <a:r>
@@ -2609,6 +3211,39 @@
                 <a:cs typeface="Yu Gothic"/>
               </a:defRPr>
             </a:lvl1pPr>
+            <a:lvl2pPr algn="ctr" marL="0" indent="0">
+              <a:buNone/>
+              <a:defRPr sz="1600" b="1">
+                <a:solidFill>
+                  <a:srgbClr val="21201E"/>
+                </a:solidFill>
+                <a:latin typeface="Yu Gothic"/>
+                <a:ea typeface="Yu Gothic"/>
+                <a:cs typeface="Yu Gothic"/>
+              </a:defRPr>
+            </a:lvl2pPr>
+            <a:lvl3pPr algn="ctr" marL="0" indent="0">
+              <a:buNone/>
+              <a:defRPr sz="1350" b="1">
+                <a:solidFill>
+                  <a:srgbClr val="21201E"/>
+                </a:solidFill>
+                <a:latin typeface="Yu Gothic"/>
+                <a:ea typeface="Yu Gothic"/>
+                <a:cs typeface="Yu Gothic"/>
+              </a:defRPr>
+            </a:lvl3pPr>
+            <a:lvl4pPr algn="ctr" marL="0" indent="0">
+              <a:buNone/>
+              <a:defRPr sz="1150" b="1">
+                <a:solidFill>
+                  <a:srgbClr val="21201E"/>
+                </a:solidFill>
+                <a:latin typeface="Yu Gothic"/>
+                <a:ea typeface="Yu Gothic"/>
+                <a:cs typeface="Yu Gothic"/>
+              </a:defRPr>
+            </a:lvl4pPr>
           </a:lstStyle>
           <a:p>
             <a:r>
@@ -2648,6 +3283,39 @@
                 <a:cs typeface="Yu Gothic"/>
               </a:defRPr>
             </a:lvl1pPr>
+            <a:lvl2pPr algn="ctr" marL="0" indent="0">
+              <a:buNone/>
+              <a:defRPr sz="1050" b="0">
+                <a:solidFill>
+                  <a:srgbClr val="8A8580"/>
+                </a:solidFill>
+                <a:latin typeface="Yu Gothic"/>
+                <a:ea typeface="Yu Gothic"/>
+                <a:cs typeface="Yu Gothic"/>
+              </a:defRPr>
+            </a:lvl2pPr>
+            <a:lvl3pPr algn="ctr" marL="0" indent="0">
+              <a:buNone/>
+              <a:defRPr sz="900" b="0">
+                <a:solidFill>
+                  <a:srgbClr val="8A8580"/>
+                </a:solidFill>
+                <a:latin typeface="Yu Gothic"/>
+                <a:ea typeface="Yu Gothic"/>
+                <a:cs typeface="Yu Gothic"/>
+              </a:defRPr>
+            </a:lvl3pPr>
+            <a:lvl4pPr algn="ctr" marL="0" indent="0">
+              <a:buNone/>
+              <a:defRPr sz="750" b="0">
+                <a:solidFill>
+                  <a:srgbClr val="8A8580"/>
+                </a:solidFill>
+                <a:latin typeface="Yu Gothic"/>
+                <a:ea typeface="Yu Gothic"/>
+                <a:cs typeface="Yu Gothic"/>
+              </a:defRPr>
+            </a:lvl4pPr>
           </a:lstStyle>
           <a:p>
             <a:r>
@@ -2687,6 +3355,39 @@
                 <a:cs typeface="Yu Gothic"/>
               </a:defRPr>
             </a:lvl1pPr>
+            <a:lvl2pPr algn="ctr" marL="0" indent="0">
+              <a:buNone/>
+              <a:defRPr sz="1050" b="1">
+                <a:solidFill>
+                  <a:srgbClr val="8A8580"/>
+                </a:solidFill>
+                <a:latin typeface="Yu Gothic"/>
+                <a:ea typeface="Yu Gothic"/>
+                <a:cs typeface="Yu Gothic"/>
+              </a:defRPr>
+            </a:lvl2pPr>
+            <a:lvl3pPr algn="ctr" marL="0" indent="0">
+              <a:buNone/>
+              <a:defRPr sz="900" b="1">
+                <a:solidFill>
+                  <a:srgbClr val="8A8580"/>
+                </a:solidFill>
+                <a:latin typeface="Yu Gothic"/>
+                <a:ea typeface="Yu Gothic"/>
+                <a:cs typeface="Yu Gothic"/>
+              </a:defRPr>
+            </a:lvl3pPr>
+            <a:lvl4pPr algn="ctr" marL="0" indent="0">
+              <a:buNone/>
+              <a:defRPr sz="750" b="1">
+                <a:solidFill>
+                  <a:srgbClr val="8A8580"/>
+                </a:solidFill>
+                <a:latin typeface="Yu Gothic"/>
+                <a:ea typeface="Yu Gothic"/>
+                <a:cs typeface="Yu Gothic"/>
+              </a:defRPr>
+            </a:lvl4pPr>
           </a:lstStyle>
           <a:p>
             <a:r>
@@ -2726,6 +3427,39 @@
                 <a:cs typeface="Yu Gothic"/>
               </a:defRPr>
             </a:lvl1pPr>
+            <a:lvl2pPr algn="ctr" marL="0" indent="0">
+              <a:buNone/>
+              <a:defRPr sz="1600" b="1">
+                <a:solidFill>
+                  <a:srgbClr val="21201E"/>
+                </a:solidFill>
+                <a:latin typeface="Yu Gothic"/>
+                <a:ea typeface="Yu Gothic"/>
+                <a:cs typeface="Yu Gothic"/>
+              </a:defRPr>
+            </a:lvl2pPr>
+            <a:lvl3pPr algn="ctr" marL="0" indent="0">
+              <a:buNone/>
+              <a:defRPr sz="1350" b="1">
+                <a:solidFill>
+                  <a:srgbClr val="21201E"/>
+                </a:solidFill>
+                <a:latin typeface="Yu Gothic"/>
+                <a:ea typeface="Yu Gothic"/>
+                <a:cs typeface="Yu Gothic"/>
+              </a:defRPr>
+            </a:lvl3pPr>
+            <a:lvl4pPr algn="ctr" marL="0" indent="0">
+              <a:buNone/>
+              <a:defRPr sz="1150" b="1">
+                <a:solidFill>
+                  <a:srgbClr val="21201E"/>
+                </a:solidFill>
+                <a:latin typeface="Yu Gothic"/>
+                <a:ea typeface="Yu Gothic"/>
+                <a:cs typeface="Yu Gothic"/>
+              </a:defRPr>
+            </a:lvl4pPr>
           </a:lstStyle>
           <a:p>
             <a:r>
@@ -2765,6 +3499,39 @@
                 <a:cs typeface="Yu Gothic"/>
               </a:defRPr>
             </a:lvl1pPr>
+            <a:lvl2pPr algn="ctr" marL="0" indent="0">
+              <a:buNone/>
+              <a:defRPr sz="1050" b="0">
+                <a:solidFill>
+                  <a:srgbClr val="8A8580"/>
+                </a:solidFill>
+                <a:latin typeface="Yu Gothic"/>
+                <a:ea typeface="Yu Gothic"/>
+                <a:cs typeface="Yu Gothic"/>
+              </a:defRPr>
+            </a:lvl2pPr>
+            <a:lvl3pPr algn="ctr" marL="0" indent="0">
+              <a:buNone/>
+              <a:defRPr sz="900" b="0">
+                <a:solidFill>
+                  <a:srgbClr val="8A8580"/>
+                </a:solidFill>
+                <a:latin typeface="Yu Gothic"/>
+                <a:ea typeface="Yu Gothic"/>
+                <a:cs typeface="Yu Gothic"/>
+              </a:defRPr>
+            </a:lvl3pPr>
+            <a:lvl4pPr algn="ctr" marL="0" indent="0">
+              <a:buNone/>
+              <a:defRPr sz="750" b="0">
+                <a:solidFill>
+                  <a:srgbClr val="8A8580"/>
+                </a:solidFill>
+                <a:latin typeface="Yu Gothic"/>
+                <a:ea typeface="Yu Gothic"/>
+                <a:cs typeface="Yu Gothic"/>
+              </a:defRPr>
+            </a:lvl4pPr>
           </a:lstStyle>
           <a:p>
             <a:r>
@@ -2804,6 +3571,39 @@
                 <a:cs typeface="Yu Gothic"/>
               </a:defRPr>
             </a:lvl1pPr>
+            <a:lvl2pPr algn="ctr" marL="0" indent="0">
+              <a:buNone/>
+              <a:defRPr sz="1050" b="1">
+                <a:solidFill>
+                  <a:srgbClr val="8A8580"/>
+                </a:solidFill>
+                <a:latin typeface="Yu Gothic"/>
+                <a:ea typeface="Yu Gothic"/>
+                <a:cs typeface="Yu Gothic"/>
+              </a:defRPr>
+            </a:lvl2pPr>
+            <a:lvl3pPr algn="ctr" marL="0" indent="0">
+              <a:buNone/>
+              <a:defRPr sz="900" b="1">
+                <a:solidFill>
+                  <a:srgbClr val="8A8580"/>
+                </a:solidFill>
+                <a:latin typeface="Yu Gothic"/>
+                <a:ea typeface="Yu Gothic"/>
+                <a:cs typeface="Yu Gothic"/>
+              </a:defRPr>
+            </a:lvl3pPr>
+            <a:lvl4pPr algn="ctr" marL="0" indent="0">
+              <a:buNone/>
+              <a:defRPr sz="750" b="1">
+                <a:solidFill>
+                  <a:srgbClr val="8A8580"/>
+                </a:solidFill>
+                <a:latin typeface="Yu Gothic"/>
+                <a:ea typeface="Yu Gothic"/>
+                <a:cs typeface="Yu Gothic"/>
+              </a:defRPr>
+            </a:lvl4pPr>
           </a:lstStyle>
           <a:p>
             <a:r>
@@ -2843,6 +3643,39 @@
                 <a:cs typeface="Yu Gothic"/>
               </a:defRPr>
             </a:lvl1pPr>
+            <a:lvl2pPr algn="ctr" marL="0" indent="0">
+              <a:buNone/>
+              <a:defRPr sz="1600" b="1">
+                <a:solidFill>
+                  <a:srgbClr val="21201E"/>
+                </a:solidFill>
+                <a:latin typeface="Yu Gothic"/>
+                <a:ea typeface="Yu Gothic"/>
+                <a:cs typeface="Yu Gothic"/>
+              </a:defRPr>
+            </a:lvl2pPr>
+            <a:lvl3pPr algn="ctr" marL="0" indent="0">
+              <a:buNone/>
+              <a:defRPr sz="1350" b="1">
+                <a:solidFill>
+                  <a:srgbClr val="21201E"/>
+                </a:solidFill>
+                <a:latin typeface="Yu Gothic"/>
+                <a:ea typeface="Yu Gothic"/>
+                <a:cs typeface="Yu Gothic"/>
+              </a:defRPr>
+            </a:lvl3pPr>
+            <a:lvl4pPr algn="ctr" marL="0" indent="0">
+              <a:buNone/>
+              <a:defRPr sz="1150" b="1">
+                <a:solidFill>
+                  <a:srgbClr val="21201E"/>
+                </a:solidFill>
+                <a:latin typeface="Yu Gothic"/>
+                <a:ea typeface="Yu Gothic"/>
+                <a:cs typeface="Yu Gothic"/>
+              </a:defRPr>
+            </a:lvl4pPr>
           </a:lstStyle>
           <a:p>
             <a:r>
@@ -2882,6 +3715,39 @@
                 <a:cs typeface="Yu Gothic"/>
               </a:defRPr>
             </a:lvl1pPr>
+            <a:lvl2pPr algn="ctr" marL="0" indent="0">
+              <a:buNone/>
+              <a:defRPr sz="1050" b="0">
+                <a:solidFill>
+                  <a:srgbClr val="8A8580"/>
+                </a:solidFill>
+                <a:latin typeface="Yu Gothic"/>
+                <a:ea typeface="Yu Gothic"/>
+                <a:cs typeface="Yu Gothic"/>
+              </a:defRPr>
+            </a:lvl2pPr>
+            <a:lvl3pPr algn="ctr" marL="0" indent="0">
+              <a:buNone/>
+              <a:defRPr sz="900" b="0">
+                <a:solidFill>
+                  <a:srgbClr val="8A8580"/>
+                </a:solidFill>
+                <a:latin typeface="Yu Gothic"/>
+                <a:ea typeface="Yu Gothic"/>
+                <a:cs typeface="Yu Gothic"/>
+              </a:defRPr>
+            </a:lvl3pPr>
+            <a:lvl4pPr algn="ctr" marL="0" indent="0">
+              <a:buNone/>
+              <a:defRPr sz="750" b="0">
+                <a:solidFill>
+                  <a:srgbClr val="8A8580"/>
+                </a:solidFill>
+                <a:latin typeface="Yu Gothic"/>
+                <a:ea typeface="Yu Gothic"/>
+                <a:cs typeface="Yu Gothic"/>
+              </a:defRPr>
+            </a:lvl4pPr>
           </a:lstStyle>
           <a:p>
             <a:r>
@@ -3305,6 +4171,39 @@
                 <a:cs typeface="Yu Gothic"/>
               </a:defRPr>
             </a:lvl1pPr>
+            <a:lvl2pPr algn="l" marL="0" indent="0">
+              <a:buNone/>
+              <a:defRPr sz="1600" b="1">
+                <a:solidFill>
+                  <a:srgbClr val="FF4D3D"/>
+                </a:solidFill>
+                <a:latin typeface="Yu Gothic"/>
+                <a:ea typeface="Yu Gothic"/>
+                <a:cs typeface="Yu Gothic"/>
+              </a:defRPr>
+            </a:lvl2pPr>
+            <a:lvl3pPr algn="l" marL="0" indent="0">
+              <a:buNone/>
+              <a:defRPr sz="1350" b="1">
+                <a:solidFill>
+                  <a:srgbClr val="FF4D3D"/>
+                </a:solidFill>
+                <a:latin typeface="Yu Gothic"/>
+                <a:ea typeface="Yu Gothic"/>
+                <a:cs typeface="Yu Gothic"/>
+              </a:defRPr>
+            </a:lvl3pPr>
+            <a:lvl4pPr algn="l" marL="0" indent="0">
+              <a:buNone/>
+              <a:defRPr sz="1150" b="1">
+                <a:solidFill>
+                  <a:srgbClr val="FF4D3D"/>
+                </a:solidFill>
+                <a:latin typeface="Yu Gothic"/>
+                <a:ea typeface="Yu Gothic"/>
+                <a:cs typeface="Yu Gothic"/>
+              </a:defRPr>
+            </a:lvl4pPr>
           </a:lstStyle>
           <a:p>
             <a:r>
@@ -3344,6 +4243,39 @@
                 <a:cs typeface="Yu Gothic"/>
               </a:defRPr>
             </a:lvl1pPr>
+            <a:lvl2pPr algn="l" marL="0" indent="0">
+              <a:buNone/>
+              <a:defRPr sz="1250" b="0">
+                <a:solidFill>
+                  <a:srgbClr val="F5EFE5"/>
+                </a:solidFill>
+                <a:latin typeface="Yu Gothic"/>
+                <a:ea typeface="Yu Gothic"/>
+                <a:cs typeface="Yu Gothic"/>
+              </a:defRPr>
+            </a:lvl2pPr>
+            <a:lvl3pPr algn="l" marL="0" indent="0">
+              <a:buNone/>
+              <a:defRPr sz="1050" b="0">
+                <a:solidFill>
+                  <a:srgbClr val="F5EFE5"/>
+                </a:solidFill>
+                <a:latin typeface="Yu Gothic"/>
+                <a:ea typeface="Yu Gothic"/>
+                <a:cs typeface="Yu Gothic"/>
+              </a:defRPr>
+            </a:lvl3pPr>
+            <a:lvl4pPr algn="l" marL="0" indent="0">
+              <a:buNone/>
+              <a:defRPr sz="900" b="0">
+                <a:solidFill>
+                  <a:srgbClr val="F5EFE5"/>
+                </a:solidFill>
+                <a:latin typeface="Yu Gothic"/>
+                <a:ea typeface="Yu Gothic"/>
+                <a:cs typeface="Yu Gothic"/>
+              </a:defRPr>
+            </a:lvl4pPr>
           </a:lstStyle>
           <a:p>
             <a:r>
@@ -3383,6 +4315,39 @@
                 <a:cs typeface="Yu Gothic"/>
               </a:defRPr>
             </a:lvl1pPr>
+            <a:lvl2pPr algn="l" marL="0" indent="0">
+              <a:buNone/>
+              <a:defRPr sz="1600" b="1">
+                <a:solidFill>
+                  <a:srgbClr val="FFFFFF"/>
+                </a:solidFill>
+                <a:latin typeface="Yu Gothic"/>
+                <a:ea typeface="Yu Gothic"/>
+                <a:cs typeface="Yu Gothic"/>
+              </a:defRPr>
+            </a:lvl2pPr>
+            <a:lvl3pPr algn="l" marL="0" indent="0">
+              <a:buNone/>
+              <a:defRPr sz="1350" b="1">
+                <a:solidFill>
+                  <a:srgbClr val="FFFFFF"/>
+                </a:solidFill>
+                <a:latin typeface="Yu Gothic"/>
+                <a:ea typeface="Yu Gothic"/>
+                <a:cs typeface="Yu Gothic"/>
+              </a:defRPr>
+            </a:lvl3pPr>
+            <a:lvl4pPr algn="l" marL="0" indent="0">
+              <a:buNone/>
+              <a:defRPr sz="1150" b="1">
+                <a:solidFill>
+                  <a:srgbClr val="FFFFFF"/>
+                </a:solidFill>
+                <a:latin typeface="Yu Gothic"/>
+                <a:ea typeface="Yu Gothic"/>
+                <a:cs typeface="Yu Gothic"/>
+              </a:defRPr>
+            </a:lvl4pPr>
           </a:lstStyle>
           <a:p>
             <a:r>
@@ -3422,6 +4387,39 @@
                 <a:cs typeface="Yu Gothic"/>
               </a:defRPr>
             </a:lvl1pPr>
+            <a:lvl2pPr algn="l" marL="0" indent="0">
+              <a:buNone/>
+              <a:defRPr sz="1250" b="0">
+                <a:solidFill>
+                  <a:srgbClr val="FFF3F1"/>
+                </a:solidFill>
+                <a:latin typeface="Yu Gothic"/>
+                <a:ea typeface="Yu Gothic"/>
+                <a:cs typeface="Yu Gothic"/>
+              </a:defRPr>
+            </a:lvl2pPr>
+            <a:lvl3pPr algn="l" marL="0" indent="0">
+              <a:buNone/>
+              <a:defRPr sz="1050" b="0">
+                <a:solidFill>
+                  <a:srgbClr val="FFF3F1"/>
+                </a:solidFill>
+                <a:latin typeface="Yu Gothic"/>
+                <a:ea typeface="Yu Gothic"/>
+                <a:cs typeface="Yu Gothic"/>
+              </a:defRPr>
+            </a:lvl3pPr>
+            <a:lvl4pPr algn="l" marL="0" indent="0">
+              <a:buNone/>
+              <a:defRPr sz="900" b="0">
+                <a:solidFill>
+                  <a:srgbClr val="FFF3F1"/>
+                </a:solidFill>
+                <a:latin typeface="Yu Gothic"/>
+                <a:ea typeface="Yu Gothic"/>
+                <a:cs typeface="Yu Gothic"/>
+              </a:defRPr>
+            </a:lvl4pPr>
           </a:lstStyle>
           <a:p>
             <a:r>
@@ -3552,6 +4550,27 @@
                 </a:solidFill>
               </a:defRPr>
             </a:lvl1pPr>
+            <a:lvl2pPr algn="l">
+              <a:defRPr sz="1250" b="0">
+                <a:solidFill>
+                  <a:srgbClr val="8A8580"/>
+                </a:solidFill>
+              </a:defRPr>
+            </a:lvl2pPr>
+            <a:lvl3pPr algn="l">
+              <a:defRPr sz="1050" b="0">
+                <a:solidFill>
+                  <a:srgbClr val="8A8580"/>
+                </a:solidFill>
+              </a:defRPr>
+            </a:lvl3pPr>
+            <a:lvl4pPr algn="l">
+              <a:defRPr sz="900" b="0">
+                <a:solidFill>
+                  <a:srgbClr val="8A8580"/>
+                </a:solidFill>
+              </a:defRPr>
+            </a:lvl4pPr>
           </a:lstStyle>
           <a:p>
             <a:pPr lvl="0"/>
@@ -4144,28 +5163,28 @@
           <a:bodyPr anchor="t"/>
           <a:lstStyle>
             <a:lvl2pPr>
-              <a:defRPr sz="2400"/>
+              <a:defRPr sz="1150"/>
             </a:lvl2pPr>
             <a:lvl3pPr>
-              <a:defRPr sz="2000"/>
+              <a:defRPr sz="950"/>
             </a:lvl3pPr>
             <a:lvl4pPr>
-              <a:defRPr sz="1800"/>
+              <a:defRPr sz="850"/>
             </a:lvl4pPr>
             <a:lvl5pPr>
-              <a:defRPr sz="1800"/>
+              <a:defRPr sz="850"/>
             </a:lvl5pPr>
             <a:lvl6pPr>
-              <a:defRPr sz="1800"/>
+              <a:defRPr sz="850"/>
             </a:lvl6pPr>
             <a:lvl7pPr>
-              <a:defRPr sz="1800"/>
+              <a:defRPr sz="850"/>
             </a:lvl7pPr>
             <a:lvl8pPr>
-              <a:defRPr sz="1800"/>
+              <a:defRPr sz="850"/>
             </a:lvl8pPr>
             <a:lvl9pPr>
-              <a:defRPr sz="1800"/>
+              <a:defRPr sz="850"/>
             </a:lvl9pPr>
             <a:lvl1pPr algn="l">
               <a:defRPr sz="1500" b="0">
@@ -4233,28 +5252,28 @@
           <a:bodyPr anchor="t"/>
           <a:lstStyle>
             <a:lvl2pPr>
-              <a:defRPr sz="2400"/>
+              <a:defRPr sz="1150"/>
             </a:lvl2pPr>
             <a:lvl3pPr>
-              <a:defRPr sz="2000"/>
+              <a:defRPr sz="950"/>
             </a:lvl3pPr>
             <a:lvl4pPr>
-              <a:defRPr sz="1800"/>
+              <a:defRPr sz="850"/>
             </a:lvl4pPr>
             <a:lvl5pPr>
-              <a:defRPr sz="1800"/>
+              <a:defRPr sz="850"/>
             </a:lvl5pPr>
             <a:lvl6pPr>
-              <a:defRPr sz="1800"/>
+              <a:defRPr sz="850"/>
             </a:lvl6pPr>
             <a:lvl7pPr>
-              <a:defRPr sz="1800"/>
+              <a:defRPr sz="850"/>
             </a:lvl7pPr>
             <a:lvl8pPr>
-              <a:defRPr sz="1800"/>
+              <a:defRPr sz="850"/>
             </a:lvl8pPr>
             <a:lvl9pPr>
-              <a:defRPr sz="1800"/>
+              <a:defRPr sz="850"/>
             </a:lvl9pPr>
             <a:lvl1pPr algn="l">
               <a:defRPr sz="1500" b="0">
@@ -4563,11 +5582,11 @@
           <a:lstStyle>
             <a:lvl2pPr marL="457200" indent="0">
               <a:buNone/>
-              <a:defRPr sz="2000" b="1"/>
+              <a:defRPr sz="1000" b="1"/>
             </a:lvl2pPr>
             <a:lvl3pPr marL="914400" indent="0">
               <a:buNone/>
-              <a:defRPr sz="1800" b="1"/>
+              <a:defRPr sz="900" b="1"/>
             </a:lvl3pPr>
             <a:lvl4pPr marL="1371600" indent="0">
               <a:buNone/>
@@ -4631,28 +5650,28 @@
           <a:bodyPr anchor="t"/>
           <a:lstStyle>
             <a:lvl2pPr>
-              <a:defRPr sz="2000"/>
+              <a:defRPr sz="950"/>
             </a:lvl2pPr>
             <a:lvl3pPr>
-              <a:defRPr sz="1800"/>
+              <a:defRPr sz="850"/>
             </a:lvl3pPr>
             <a:lvl4pPr>
-              <a:defRPr sz="1600"/>
+              <a:defRPr sz="750"/>
             </a:lvl4pPr>
             <a:lvl5pPr>
-              <a:defRPr sz="1600"/>
+              <a:defRPr sz="750"/>
             </a:lvl5pPr>
             <a:lvl6pPr>
-              <a:defRPr sz="1600"/>
+              <a:defRPr sz="750"/>
             </a:lvl6pPr>
             <a:lvl7pPr>
-              <a:defRPr sz="1600"/>
+              <a:defRPr sz="750"/>
             </a:lvl7pPr>
             <a:lvl8pPr>
-              <a:defRPr sz="1600"/>
+              <a:defRPr sz="750"/>
             </a:lvl8pPr>
             <a:lvl9pPr>
-              <a:defRPr sz="1600"/>
+              <a:defRPr sz="750"/>
             </a:lvl9pPr>
             <a:lvl1pPr algn="l">
               <a:defRPr sz="1500" b="0">
@@ -4721,35 +5740,35 @@
           <a:lstStyle>
             <a:lvl2pPr marL="457200" indent="0">
               <a:buNone/>
-              <a:defRPr sz="2000" b="1"/>
+              <a:defRPr sz="100" b="1"/>
             </a:lvl2pPr>
             <a:lvl3pPr marL="914400" indent="0">
               <a:buNone/>
-              <a:defRPr sz="1800" b="1"/>
+              <a:defRPr sz="100" b="1"/>
             </a:lvl3pPr>
             <a:lvl4pPr marL="1371600" indent="0">
               <a:buNone/>
-              <a:defRPr sz="1600" b="1"/>
+              <a:defRPr sz="100" b="1"/>
             </a:lvl4pPr>
             <a:lvl5pPr marL="1828800" indent="0">
               <a:buNone/>
-              <a:defRPr sz="1600" b="1"/>
+              <a:defRPr sz="100" b="1"/>
             </a:lvl5pPr>
             <a:lvl6pPr marL="2286000" indent="0">
               <a:buNone/>
-              <a:defRPr sz="1600" b="1"/>
+              <a:defRPr sz="100" b="1"/>
             </a:lvl6pPr>
             <a:lvl7pPr marL="2743200" indent="0">
               <a:buNone/>
-              <a:defRPr sz="1600" b="1"/>
+              <a:defRPr sz="100" b="1"/>
             </a:lvl7pPr>
             <a:lvl8pPr marL="3200400" indent="0">
               <a:buNone/>
-              <a:defRPr sz="1600" b="1"/>
+              <a:defRPr sz="100" b="1"/>
             </a:lvl8pPr>
             <a:lvl9pPr marL="3657600" indent="0">
               <a:buNone/>
-              <a:defRPr sz="1600" b="1"/>
+              <a:defRPr sz="100" b="1"/>
             </a:lvl9pPr>
             <a:lvl1pPr algn="l" indent="0" marL="0">
               <a:buNone/>
@@ -4789,28 +5808,28 @@
           <a:bodyPr anchor="t"/>
           <a:lstStyle>
             <a:lvl2pPr>
-              <a:defRPr sz="2000"/>
+              <a:defRPr sz="900"/>
             </a:lvl2pPr>
             <a:lvl3pPr>
-              <a:defRPr sz="1800"/>
+              <a:defRPr sz="800"/>
             </a:lvl3pPr>
             <a:lvl4pPr>
-              <a:defRPr sz="1600"/>
+              <a:defRPr sz="700"/>
             </a:lvl4pPr>
             <a:lvl5pPr>
-              <a:defRPr sz="1600"/>
+              <a:defRPr sz="700"/>
             </a:lvl5pPr>
             <a:lvl6pPr>
-              <a:defRPr sz="1600"/>
+              <a:defRPr sz="700"/>
             </a:lvl6pPr>
             <a:lvl7pPr>
-              <a:defRPr sz="1600"/>
+              <a:defRPr sz="700"/>
             </a:lvl7pPr>
             <a:lvl8pPr>
-              <a:defRPr sz="1600"/>
+              <a:defRPr sz="700"/>
             </a:lvl8pPr>
             <a:lvl9pPr>
-              <a:defRPr sz="1600"/>
+              <a:defRPr sz="700"/>
             </a:lvl9pPr>
             <a:lvl1pPr algn="l">
               <a:defRPr sz="1400" b="0">
@@ -5133,6 +6152,36 @@
                 <a:ea typeface="Yu Gothic"/>
               </a:defRPr>
             </a:lvl1pPr>
+            <a:lvl2pPr algn="l" marL="0" indent="0">
+              <a:buNone/>
+              <a:defRPr sz="1300" b="1">
+                <a:solidFill>
+                  <a:srgbClr val="8A8580"/>
+                </a:solidFill>
+                <a:latin typeface="Yu Gothic"/>
+                <a:ea typeface="Yu Gothic"/>
+              </a:defRPr>
+            </a:lvl2pPr>
+            <a:lvl3pPr algn="l" marL="0" indent="0">
+              <a:buNone/>
+              <a:defRPr sz="1150" b="1">
+                <a:solidFill>
+                  <a:srgbClr val="8A8580"/>
+                </a:solidFill>
+                <a:latin typeface="Yu Gothic"/>
+                <a:ea typeface="Yu Gothic"/>
+              </a:defRPr>
+            </a:lvl3pPr>
+            <a:lvl4pPr algn="l" marL="0" indent="0">
+              <a:buNone/>
+              <a:defRPr sz="950" b="1">
+                <a:solidFill>
+                  <a:srgbClr val="8A8580"/>
+                </a:solidFill>
+                <a:latin typeface="Yu Gothic"/>
+                <a:ea typeface="Yu Gothic"/>
+              </a:defRPr>
+            </a:lvl4pPr>
           </a:lstStyle>
           <a:p>
             <a:r>
@@ -5205,6 +6254,30 @@
                 </a:solidFill>
               </a:defRPr>
             </a:lvl1pPr>
+            <a:lvl2pPr algn="l" marL="0" indent="0">
+              <a:buNone/>
+              <a:defRPr sz="1250" b="0">
+                <a:solidFill>
+                  <a:srgbClr val="21201E"/>
+                </a:solidFill>
+              </a:defRPr>
+            </a:lvl2pPr>
+            <a:lvl3pPr algn="l" marL="0" indent="0">
+              <a:buNone/>
+              <a:defRPr sz="1050" b="0">
+                <a:solidFill>
+                  <a:srgbClr val="21201E"/>
+                </a:solidFill>
+              </a:defRPr>
+            </a:lvl3pPr>
+            <a:lvl4pPr algn="l" marL="0" indent="0">
+              <a:buNone/>
+              <a:defRPr sz="900" b="0">
+                <a:solidFill>
+                  <a:srgbClr val="21201E"/>
+                </a:solidFill>
+              </a:defRPr>
+            </a:lvl4pPr>
           </a:lstStyle>
           <a:p>
             <a:r>
